--- a/docs/slides/Introduction to GIS.pptx
+++ b/docs/slides/Introduction to GIS.pptx
@@ -3295,6 +3295,53 @@
       </p:grpSpPr>
       <p:sp>
         <p:nvSpPr>
+          <p:cNvPr id="10" name="Rounded Rectangle 9"/>
+          <p:cNvSpPr/>
+          <p:nvPr/>
+        </p:nvSpPr>
+        <p:spPr>
+          <a:xfrm>
+            <a:off x="548640" y="4755000"/>
+            <a:ext cx="12127740" cy="566928"/>
+          </a:xfrm>
+          <a:prstGeom prst="roundRect">
+            <a:avLst>
+              <a:gd name="adj" fmla="val 12000"/>
+            </a:avLst>
+          </a:prstGeom>
+          <a:solidFill>
+            <a:srgbClr val="173A5E"/>
+          </a:solidFill>
+          <a:ln>
+            <a:noFill/>
+          </a:ln>
+          <a:effectLst/>
+        </p:spPr>
+        <p:style>
+          <a:lnRef idx="1">
+            <a:schemeClr val="accent1"/>
+          </a:lnRef>
+          <a:fillRef idx="3">
+            <a:schemeClr val="accent1"/>
+          </a:fillRef>
+          <a:effectRef idx="2">
+            <a:schemeClr val="accent1"/>
+          </a:effectRef>
+          <a:fontRef idx="minor">
+            <a:schemeClr val="lt1"/>
+          </a:fontRef>
+        </p:style>
+        <p:txBody>
+          <a:bodyPr rtlCol="0" anchor="ctr"/>
+          <a:lstStyle/>
+          <a:p>
+            <a:pPr algn="ctr"/>
+            <a:endParaRPr/>
+          </a:p>
+        </p:txBody>
+      </p:sp>
+      <p:sp>
+        <p:nvSpPr>
           <p:cNvPr id="2" name="Shape 0"/>
           <p:cNvSpPr/>
           <p:nvPr/>
@@ -3526,6 +3573,265 @@
               <a:t>Foundations of Geographic Information Science and Systems</a:t>
             </a:r>
             <a:endParaRPr lang="en-US" sz="1200" dirty="0"/>
+          </a:p>
+        </p:txBody>
+      </p:sp>
+      <p:sp>
+        <p:nvSpPr>
+          <p:cNvPr id="9" name="TextBox 8"/>
+          <p:cNvSpPr txBox="1"/>
+          <p:nvPr/>
+        </p:nvSpPr>
+        <p:spPr>
+          <a:xfrm>
+            <a:off x="548640" y="4435000"/>
+            <a:ext cx="6000000" cy="240000"/>
+          </a:xfrm>
+          <a:prstGeom prst="rect">
+            <a:avLst/>
+          </a:prstGeom>
+          <a:noFill/>
+        </p:spPr>
+        <p:txBody>
+          <a:bodyPr wrap="square">
+            <a:spAutoFit/>
+          </a:bodyPr>
+          <a:lstStyle/>
+          <a:p>
+            <a:r>
+              <a:rPr sz="1050" b="1" i="0">
+                <a:solidFill>
+                  <a:srgbClr val="E97132"/>
+                </a:solidFill>
+                <a:latin typeface="Calibri"/>
+              </a:rPr>
+              <a:t>JUMP TO A SECTION</a:t>
+            </a:r>
+          </a:p>
+        </p:txBody>
+      </p:sp>
+      <p:sp>
+        <p:nvSpPr>
+          <p:cNvPr id="11" name="TextBox 10">
+            <a:hlinkClick r:id="rId4" action="ppaction://hlinksldjump"/>
+          </p:cNvPr>
+          <p:cNvSpPr txBox="1"/>
+          <p:nvPr/>
+        </p:nvSpPr>
+        <p:spPr>
+          <a:xfrm>
+            <a:off x="548640" y="4878464"/>
+            <a:ext cx="2315820" cy="320000"/>
+          </a:xfrm>
+          <a:prstGeom prst="rect">
+            <a:avLst/>
+          </a:prstGeom>
+          <a:noFill/>
+        </p:spPr>
+        <p:txBody>
+          <a:bodyPr wrap="none">
+            <a:spAutoFit/>
+          </a:bodyPr>
+          <a:lstStyle/>
+          <a:p>
+            <a:r>
+              <a:rPr sz="950" b="1">
+                <a:solidFill>
+                  <a:srgbClr val="E97132"/>
+                </a:solidFill>
+                <a:latin typeface="Calibri"/>
+              </a:rPr>
+              <a:t>01  </a:t>
+            </a:r>
+            <a:r>
+              <a:rPr sz="950" b="0" u="sng">
+                <a:solidFill>
+                  <a:srgbClr val="CADCFC"/>
+                </a:solidFill>
+                <a:latin typeface="Calibri"/>
+              </a:rPr>
+              <a:t>Overview &amp; Intro</a:t>
+            </a:r>
+          </a:p>
+        </p:txBody>
+      </p:sp>
+      <p:sp>
+        <p:nvSpPr>
+          <p:cNvPr id="12" name="TextBox 11">
+            <a:hlinkClick r:id="rId5" action="ppaction://hlinksldjump"/>
+          </p:cNvPr>
+          <p:cNvSpPr txBox="1"/>
+          <p:nvPr/>
+        </p:nvSpPr>
+        <p:spPr>
+          <a:xfrm>
+            <a:off x="1880484" y="4878464"/>
+            <a:ext cx="2315820" cy="320000"/>
+          </a:xfrm>
+          <a:prstGeom prst="rect">
+            <a:avLst/>
+          </a:prstGeom>
+          <a:noFill/>
+        </p:spPr>
+        <p:txBody>
+          <a:bodyPr wrap="none">
+            <a:spAutoFit/>
+          </a:bodyPr>
+          <a:lstStyle/>
+          <a:p>
+            <a:r>
+              <a:rPr sz="950" b="1" dirty="0">
+                <a:solidFill>
+                  <a:srgbClr val="E97132"/>
+                </a:solidFill>
+                <a:latin typeface="Calibri"/>
+              </a:rPr>
+              <a:t>02  </a:t>
+            </a:r>
+            <a:r>
+              <a:rPr sz="950" b="0" u="sng" dirty="0">
+                <a:solidFill>
+                  <a:srgbClr val="CADCFC"/>
+                </a:solidFill>
+                <a:latin typeface="Calibri"/>
+              </a:rPr>
+              <a:t>Software Install</a:t>
+            </a:r>
+          </a:p>
+        </p:txBody>
+      </p:sp>
+      <p:sp>
+        <p:nvSpPr>
+          <p:cNvPr id="13" name="TextBox 12">
+            <a:hlinkClick r:id="rId6" action="ppaction://hlinksldjump"/>
+          </p:cNvPr>
+          <p:cNvSpPr txBox="1"/>
+          <p:nvPr/>
+        </p:nvSpPr>
+        <p:spPr>
+          <a:xfrm>
+            <a:off x="3204377" y="4878464"/>
+            <a:ext cx="2315820" cy="320000"/>
+          </a:xfrm>
+          <a:prstGeom prst="rect">
+            <a:avLst/>
+          </a:prstGeom>
+          <a:noFill/>
+        </p:spPr>
+        <p:txBody>
+          <a:bodyPr wrap="none">
+            <a:spAutoFit/>
+          </a:bodyPr>
+          <a:lstStyle/>
+          <a:p>
+            <a:r>
+              <a:rPr sz="950" b="1" dirty="0">
+                <a:solidFill>
+                  <a:srgbClr val="E97132"/>
+                </a:solidFill>
+                <a:latin typeface="Calibri"/>
+              </a:rPr>
+              <a:t>03  </a:t>
+            </a:r>
+            <a:r>
+              <a:rPr sz="950" b="0" u="sng" dirty="0">
+                <a:solidFill>
+                  <a:srgbClr val="CADCFC"/>
+                </a:solidFill>
+                <a:latin typeface="Calibri"/>
+              </a:rPr>
+              <a:t>History &amp; Ecosystem</a:t>
+            </a:r>
+          </a:p>
+        </p:txBody>
+      </p:sp>
+      <p:sp>
+        <p:nvSpPr>
+          <p:cNvPr id="14" name="TextBox 13">
+            <a:hlinkClick r:id="rId7" action="ppaction://hlinksldjump"/>
+          </p:cNvPr>
+          <p:cNvSpPr txBox="1"/>
+          <p:nvPr/>
+        </p:nvSpPr>
+        <p:spPr>
+          <a:xfrm>
+            <a:off x="4798622" y="4878464"/>
+            <a:ext cx="2315820" cy="320000"/>
+          </a:xfrm>
+          <a:prstGeom prst="rect">
+            <a:avLst/>
+          </a:prstGeom>
+          <a:noFill/>
+        </p:spPr>
+        <p:txBody>
+          <a:bodyPr wrap="none">
+            <a:spAutoFit/>
+          </a:bodyPr>
+          <a:lstStyle/>
+          <a:p>
+            <a:r>
+              <a:rPr sz="950" b="1" dirty="0">
+                <a:solidFill>
+                  <a:srgbClr val="E97132"/>
+                </a:solidFill>
+                <a:latin typeface="Calibri"/>
+              </a:rPr>
+              <a:t>04  </a:t>
+            </a:r>
+            <a:r>
+              <a:rPr sz="950" b="0" u="sng" dirty="0">
+                <a:solidFill>
+                  <a:srgbClr val="CADCFC"/>
+                </a:solidFill>
+                <a:latin typeface="Calibri"/>
+              </a:rPr>
+              <a:t>GIS/GISc Applications</a:t>
+            </a:r>
+          </a:p>
+        </p:txBody>
+      </p:sp>
+      <p:sp>
+        <p:nvSpPr>
+          <p:cNvPr id="15" name="TextBox 14">
+            <a:hlinkClick r:id="rId8" action="ppaction://hlinksldjump"/>
+          </p:cNvPr>
+          <p:cNvSpPr txBox="1"/>
+          <p:nvPr/>
+        </p:nvSpPr>
+        <p:spPr>
+          <a:xfrm>
+            <a:off x="6488279" y="4878464"/>
+            <a:ext cx="2315820" cy="320000"/>
+          </a:xfrm>
+          <a:prstGeom prst="rect">
+            <a:avLst/>
+          </a:prstGeom>
+          <a:noFill/>
+        </p:spPr>
+        <p:txBody>
+          <a:bodyPr wrap="none">
+            <a:spAutoFit/>
+          </a:bodyPr>
+          <a:lstStyle/>
+          <a:p>
+            <a:r>
+              <a:rPr sz="950" b="1" dirty="0">
+                <a:solidFill>
+                  <a:srgbClr val="E97132"/>
+                </a:solidFill>
+                <a:latin typeface="Calibri"/>
+              </a:rPr>
+              <a:t>05  </a:t>
+            </a:r>
+            <a:r>
+              <a:rPr sz="950" b="0" u="sng" dirty="0">
+                <a:solidFill>
+                  <a:srgbClr val="CADCFC"/>
+                </a:solidFill>
+                <a:latin typeface="Calibri"/>
+              </a:rPr>
+              <a:t>Why It Matters</a:t>
+            </a:r>
           </a:p>
         </p:txBody>
       </p:sp>
@@ -11452,7 +11758,9 @@
       </p:sp>
       <p:sp>
         <p:nvSpPr>
-          <p:cNvPr id="4" name="Shape 2"/>
+          <p:cNvPr id="4" name="Shape 2">
+            <a:hlinkClick r:id="rId3" action="ppaction://hlinksldjump"/>
+          </p:cNvPr>
           <p:cNvSpPr/>
           <p:nvPr/>
         </p:nvSpPr>
@@ -11481,7 +11789,9 @@
       </p:sp>
       <p:sp>
         <p:nvSpPr>
-          <p:cNvPr id="5" name="Text 3"/>
+          <p:cNvPr id="5" name="Text 3">
+            <a:hlinkClick r:id="rId3" action="ppaction://hlinksldjump"/>
+          </p:cNvPr>
           <p:cNvSpPr/>
           <p:nvPr/>
         </p:nvSpPr>
@@ -11520,7 +11830,9 @@
       </p:sp>
       <p:sp>
         <p:nvSpPr>
-          <p:cNvPr id="6" name="Text 4"/>
+          <p:cNvPr id="6" name="Text 4">
+            <a:hlinkClick r:id="rId3" action="ppaction://hlinksldjump"/>
+          </p:cNvPr>
           <p:cNvSpPr/>
           <p:nvPr/>
         </p:nvSpPr>
@@ -11543,7 +11855,7 @@
               <a:buNone/>
             </a:pPr>
             <a:r>
-              <a:rPr lang="en-US" sz="1800" b="1" dirty="0">
+              <a:rPr lang="en-US" sz="1800" b="1" u="sng" dirty="0">
                 <a:solidFill>
                   <a:srgbClr val="FFFFFF"/>
                 </a:solidFill>
@@ -11559,7 +11871,9 @@
       </p:sp>
       <p:sp>
         <p:nvSpPr>
-          <p:cNvPr id="7" name="Shape 5"/>
+          <p:cNvPr id="7" name="Shape 5">
+            <a:hlinkClick r:id="rId4" action="ppaction://hlinksldjump"/>
+          </p:cNvPr>
           <p:cNvSpPr/>
           <p:nvPr/>
         </p:nvSpPr>
@@ -11588,7 +11902,9 @@
       </p:sp>
       <p:sp>
         <p:nvSpPr>
-          <p:cNvPr id="8" name="Text 6"/>
+          <p:cNvPr id="8" name="Text 6">
+            <a:hlinkClick r:id="rId4" action="ppaction://hlinksldjump"/>
+          </p:cNvPr>
           <p:cNvSpPr/>
           <p:nvPr/>
         </p:nvSpPr>
@@ -11627,7 +11943,9 @@
       </p:sp>
       <p:sp>
         <p:nvSpPr>
-          <p:cNvPr id="9" name="Text 7"/>
+          <p:cNvPr id="9" name="Text 7">
+            <a:hlinkClick r:id="rId4" action="ppaction://hlinksldjump"/>
+          </p:cNvPr>
           <p:cNvSpPr/>
           <p:nvPr/>
         </p:nvSpPr>
@@ -11650,7 +11968,7 @@
               <a:buNone/>
             </a:pPr>
             <a:r>
-              <a:rPr lang="en-US" sz="1800" b="1" dirty="0">
+              <a:rPr lang="en-US" sz="1800" b="1" u="sng" dirty="0">
                 <a:solidFill>
                   <a:srgbClr val="0E2841"/>
                 </a:solidFill>
@@ -11666,7 +11984,9 @@
       </p:sp>
       <p:sp>
         <p:nvSpPr>
-          <p:cNvPr id="10" name="Shape 8"/>
+          <p:cNvPr id="10" name="Shape 8">
+            <a:hlinkClick r:id="rId5" action="ppaction://hlinksldjump"/>
+          </p:cNvPr>
           <p:cNvSpPr/>
           <p:nvPr/>
         </p:nvSpPr>
@@ -11695,7 +12015,9 @@
       </p:sp>
       <p:sp>
         <p:nvSpPr>
-          <p:cNvPr id="11" name="Text 9"/>
+          <p:cNvPr id="11" name="Text 9">
+            <a:hlinkClick r:id="rId5" action="ppaction://hlinksldjump"/>
+          </p:cNvPr>
           <p:cNvSpPr/>
           <p:nvPr/>
         </p:nvSpPr>
@@ -11734,7 +12056,9 @@
       </p:sp>
       <p:sp>
         <p:nvSpPr>
-          <p:cNvPr id="12" name="Text 10"/>
+          <p:cNvPr id="12" name="Text 10">
+            <a:hlinkClick r:id="rId5" action="ppaction://hlinksldjump"/>
+          </p:cNvPr>
           <p:cNvSpPr/>
           <p:nvPr/>
         </p:nvSpPr>
@@ -11757,7 +12081,7 @@
               <a:buNone/>
             </a:pPr>
             <a:r>
-              <a:rPr lang="en-US" sz="1800" b="1" dirty="0">
+              <a:rPr lang="en-US" sz="1800" b="1" u="sng" dirty="0">
                 <a:solidFill>
                   <a:srgbClr val="0E2841"/>
                 </a:solidFill>
@@ -11773,7 +12097,9 @@
       </p:sp>
       <p:sp>
         <p:nvSpPr>
-          <p:cNvPr id="13" name="Shape 11"/>
+          <p:cNvPr id="13" name="Shape 11">
+            <a:hlinkClick r:id="rId6" action="ppaction://hlinksldjump"/>
+          </p:cNvPr>
           <p:cNvSpPr/>
           <p:nvPr/>
         </p:nvSpPr>
@@ -11802,7 +12128,9 @@
       </p:sp>
       <p:sp>
         <p:nvSpPr>
-          <p:cNvPr id="14" name="Text 12"/>
+          <p:cNvPr id="14" name="Text 12">
+            <a:hlinkClick r:id="rId6" action="ppaction://hlinksldjump"/>
+          </p:cNvPr>
           <p:cNvSpPr/>
           <p:nvPr/>
         </p:nvSpPr>
@@ -11841,7 +12169,9 @@
       </p:sp>
       <p:sp>
         <p:nvSpPr>
-          <p:cNvPr id="15" name="Text 13"/>
+          <p:cNvPr id="15" name="Text 13">
+            <a:hlinkClick r:id="rId6" action="ppaction://hlinksldjump"/>
+          </p:cNvPr>
           <p:cNvSpPr/>
           <p:nvPr/>
         </p:nvSpPr>
@@ -11864,7 +12194,7 @@
               <a:buNone/>
             </a:pPr>
             <a:r>
-              <a:rPr lang="en-US" sz="1800" b="1" dirty="0">
+              <a:rPr lang="en-US" sz="1800" b="1" u="sng" dirty="0">
                 <a:solidFill>
                   <a:srgbClr val="0E2841"/>
                 </a:solidFill>
@@ -11880,7 +12210,9 @@
       </p:sp>
       <p:sp>
         <p:nvSpPr>
-          <p:cNvPr id="16" name="Shape 14"/>
+          <p:cNvPr id="16" name="Shape 14">
+            <a:hlinkClick r:id="rId7" action="ppaction://hlinksldjump"/>
+          </p:cNvPr>
           <p:cNvSpPr/>
           <p:nvPr/>
         </p:nvSpPr>
@@ -11909,7 +12241,9 @@
       </p:sp>
       <p:sp>
         <p:nvSpPr>
-          <p:cNvPr id="17" name="Text 15"/>
+          <p:cNvPr id="17" name="Text 15">
+            <a:hlinkClick r:id="rId7" action="ppaction://hlinksldjump"/>
+          </p:cNvPr>
           <p:cNvSpPr/>
           <p:nvPr/>
         </p:nvSpPr>
@@ -11948,7 +12282,9 @@
       </p:sp>
       <p:sp>
         <p:nvSpPr>
-          <p:cNvPr id="18" name="Text 16"/>
+          <p:cNvPr id="18" name="Text 16">
+            <a:hlinkClick r:id="rId7" action="ppaction://hlinksldjump"/>
+          </p:cNvPr>
           <p:cNvSpPr/>
           <p:nvPr/>
         </p:nvSpPr>
@@ -11971,7 +12307,7 @@
               <a:buNone/>
             </a:pPr>
             <a:r>
-              <a:rPr lang="en-US" sz="1800" b="1" dirty="0">
+              <a:rPr lang="en-US" sz="1800" b="1" u="sng" dirty="0">
                 <a:solidFill>
                   <a:srgbClr val="0E2841"/>
                 </a:solidFill>
@@ -12063,6 +12399,405 @@
           </a:p>
         </p:txBody>
       </p:sp>
+      <p:sp>
+        <p:nvSpPr>
+          <p:cNvPr id="21" name="TextBox 20"/>
+          <p:cNvSpPr txBox="1"/>
+          <p:nvPr/>
+        </p:nvSpPr>
+        <p:spPr>
+          <a:xfrm>
+            <a:off x="548640" y="1476000"/>
+            <a:ext cx="9000000" cy="240000"/>
+          </a:xfrm>
+          <a:prstGeom prst="rect">
+            <a:avLst/>
+          </a:prstGeom>
+          <a:noFill/>
+        </p:spPr>
+        <p:txBody>
+          <a:bodyPr wrap="square">
+            <a:spAutoFit/>
+          </a:bodyPr>
+          <a:lstStyle/>
+          <a:p>
+            <a:r>
+              <a:rPr sz="1150" b="0" i="1">
+                <a:solidFill>
+                  <a:srgbClr val="E97132"/>
+                </a:solidFill>
+                <a:latin typeface="Calibri"/>
+              </a:rPr>
+              <a:t>Click any section below to jump straight to it →</a:t>
+            </a:r>
+          </a:p>
+        </p:txBody>
+      </p:sp>
+      <p:sp>
+        <p:nvSpPr>
+          <p:cNvPr id="22" name="Oval 21">
+            <a:hlinkClick r:id="rId3" action="ppaction://hlinksldjump"/>
+          </p:cNvPr>
+          <p:cNvSpPr/>
+          <p:nvPr/>
+        </p:nvSpPr>
+        <p:spPr>
+          <a:xfrm>
+            <a:off x="11045952" y="1929384"/>
+            <a:ext cx="457200" cy="457200"/>
+          </a:xfrm>
+          <a:prstGeom prst="ellipse">
+            <a:avLst/>
+          </a:prstGeom>
+          <a:solidFill>
+            <a:srgbClr val="0E2841"/>
+          </a:solidFill>
+          <a:ln>
+            <a:noFill/>
+          </a:ln>
+          <a:effectLst/>
+        </p:spPr>
+        <p:style>
+          <a:lnRef idx="1">
+            <a:schemeClr val="accent1"/>
+          </a:lnRef>
+          <a:fillRef idx="3">
+            <a:schemeClr val="accent1"/>
+          </a:fillRef>
+          <a:effectRef idx="2">
+            <a:schemeClr val="accent1"/>
+          </a:effectRef>
+          <a:fontRef idx="minor">
+            <a:schemeClr val="lt1"/>
+          </a:fontRef>
+        </p:style>
+        <p:txBody>
+          <a:bodyPr rtlCol="0" anchor="ctr"/>
+          <a:lstStyle/>
+          <a:p>
+            <a:pPr algn="ctr"/>
+            <a:endParaRPr/>
+          </a:p>
+        </p:txBody>
+      </p:sp>
+      <p:pic>
+        <p:nvPicPr>
+          <p:cNvPr id="23" name="Picture 22" descr="image.png">
+            <a:hlinkClick r:id="rId3" action="ppaction://hlinksldjump"/>
+          </p:cNvPr>
+          <p:cNvPicPr>
+            <a:picLocks noChangeAspect="1"/>
+          </p:cNvPicPr>
+          <p:nvPr/>
+        </p:nvPicPr>
+        <p:blipFill>
+          <a:blip r:embed="rId8"/>
+          <a:stretch>
+            <a:fillRect/>
+          </a:stretch>
+        </p:blipFill>
+        <p:spPr>
+          <a:xfrm>
+            <a:off x="11109960" y="1993392"/>
+            <a:ext cx="329184" cy="329184"/>
+          </a:xfrm>
+          <a:prstGeom prst="rect">
+            <a:avLst/>
+          </a:prstGeom>
+        </p:spPr>
+      </p:pic>
+      <p:sp>
+        <p:nvSpPr>
+          <p:cNvPr id="24" name="Oval 23">
+            <a:hlinkClick r:id="rId4" action="ppaction://hlinksldjump"/>
+          </p:cNvPr>
+          <p:cNvSpPr/>
+          <p:nvPr/>
+        </p:nvSpPr>
+        <p:spPr>
+          <a:xfrm>
+            <a:off x="11045952" y="2880360"/>
+            <a:ext cx="457200" cy="457200"/>
+          </a:xfrm>
+          <a:prstGeom prst="ellipse">
+            <a:avLst/>
+          </a:prstGeom>
+          <a:solidFill>
+            <a:srgbClr val="E97132"/>
+          </a:solidFill>
+          <a:ln>
+            <a:noFill/>
+          </a:ln>
+          <a:effectLst/>
+        </p:spPr>
+        <p:style>
+          <a:lnRef idx="1">
+            <a:schemeClr val="accent1"/>
+          </a:lnRef>
+          <a:fillRef idx="3">
+            <a:schemeClr val="accent1"/>
+          </a:fillRef>
+          <a:effectRef idx="2">
+            <a:schemeClr val="accent1"/>
+          </a:effectRef>
+          <a:fontRef idx="minor">
+            <a:schemeClr val="lt1"/>
+          </a:fontRef>
+        </p:style>
+        <p:txBody>
+          <a:bodyPr rtlCol="0" anchor="ctr"/>
+          <a:lstStyle/>
+          <a:p>
+            <a:pPr algn="ctr"/>
+            <a:endParaRPr/>
+          </a:p>
+        </p:txBody>
+      </p:sp>
+      <p:pic>
+        <p:nvPicPr>
+          <p:cNvPr id="25" name="Picture 24" descr="image.png">
+            <a:hlinkClick r:id="rId4" action="ppaction://hlinksldjump"/>
+          </p:cNvPr>
+          <p:cNvPicPr>
+            <a:picLocks noChangeAspect="1"/>
+          </p:cNvPicPr>
+          <p:nvPr/>
+        </p:nvPicPr>
+        <p:blipFill>
+          <a:blip r:embed="rId8"/>
+          <a:stretch>
+            <a:fillRect/>
+          </a:stretch>
+        </p:blipFill>
+        <p:spPr>
+          <a:xfrm>
+            <a:off x="11109960" y="2944368"/>
+            <a:ext cx="329184" cy="329184"/>
+          </a:xfrm>
+          <a:prstGeom prst="rect">
+            <a:avLst/>
+          </a:prstGeom>
+        </p:spPr>
+      </p:pic>
+      <p:sp>
+        <p:nvSpPr>
+          <p:cNvPr id="26" name="Oval 25">
+            <a:hlinkClick r:id="rId5" action="ppaction://hlinksldjump"/>
+          </p:cNvPr>
+          <p:cNvSpPr/>
+          <p:nvPr/>
+        </p:nvSpPr>
+        <p:spPr>
+          <a:xfrm>
+            <a:off x="11045952" y="3831336"/>
+            <a:ext cx="457200" cy="457200"/>
+          </a:xfrm>
+          <a:prstGeom prst="ellipse">
+            <a:avLst/>
+          </a:prstGeom>
+          <a:solidFill>
+            <a:srgbClr val="E97132"/>
+          </a:solidFill>
+          <a:ln>
+            <a:noFill/>
+          </a:ln>
+          <a:effectLst/>
+        </p:spPr>
+        <p:style>
+          <a:lnRef idx="1">
+            <a:schemeClr val="accent1"/>
+          </a:lnRef>
+          <a:fillRef idx="3">
+            <a:schemeClr val="accent1"/>
+          </a:fillRef>
+          <a:effectRef idx="2">
+            <a:schemeClr val="accent1"/>
+          </a:effectRef>
+          <a:fontRef idx="minor">
+            <a:schemeClr val="lt1"/>
+          </a:fontRef>
+        </p:style>
+        <p:txBody>
+          <a:bodyPr rtlCol="0" anchor="ctr"/>
+          <a:lstStyle/>
+          <a:p>
+            <a:pPr algn="ctr"/>
+            <a:endParaRPr/>
+          </a:p>
+        </p:txBody>
+      </p:sp>
+      <p:pic>
+        <p:nvPicPr>
+          <p:cNvPr id="27" name="Picture 26" descr="image.png">
+            <a:hlinkClick r:id="rId5" action="ppaction://hlinksldjump"/>
+          </p:cNvPr>
+          <p:cNvPicPr>
+            <a:picLocks noChangeAspect="1"/>
+          </p:cNvPicPr>
+          <p:nvPr/>
+        </p:nvPicPr>
+        <p:blipFill>
+          <a:blip r:embed="rId8"/>
+          <a:stretch>
+            <a:fillRect/>
+          </a:stretch>
+        </p:blipFill>
+        <p:spPr>
+          <a:xfrm>
+            <a:off x="11109960" y="3895344"/>
+            <a:ext cx="329184" cy="329184"/>
+          </a:xfrm>
+          <a:prstGeom prst="rect">
+            <a:avLst/>
+          </a:prstGeom>
+        </p:spPr>
+      </p:pic>
+      <p:sp>
+        <p:nvSpPr>
+          <p:cNvPr id="28" name="Oval 27">
+            <a:hlinkClick r:id="rId6" action="ppaction://hlinksldjump"/>
+          </p:cNvPr>
+          <p:cNvSpPr/>
+          <p:nvPr/>
+        </p:nvSpPr>
+        <p:spPr>
+          <a:xfrm>
+            <a:off x="11045952" y="4782312"/>
+            <a:ext cx="457200" cy="457200"/>
+          </a:xfrm>
+          <a:prstGeom prst="ellipse">
+            <a:avLst/>
+          </a:prstGeom>
+          <a:solidFill>
+            <a:srgbClr val="E97132"/>
+          </a:solidFill>
+          <a:ln>
+            <a:noFill/>
+          </a:ln>
+          <a:effectLst/>
+        </p:spPr>
+        <p:style>
+          <a:lnRef idx="1">
+            <a:schemeClr val="accent1"/>
+          </a:lnRef>
+          <a:fillRef idx="3">
+            <a:schemeClr val="accent1"/>
+          </a:fillRef>
+          <a:effectRef idx="2">
+            <a:schemeClr val="accent1"/>
+          </a:effectRef>
+          <a:fontRef idx="minor">
+            <a:schemeClr val="lt1"/>
+          </a:fontRef>
+        </p:style>
+        <p:txBody>
+          <a:bodyPr rtlCol="0" anchor="ctr"/>
+          <a:lstStyle/>
+          <a:p>
+            <a:pPr algn="ctr"/>
+            <a:endParaRPr/>
+          </a:p>
+        </p:txBody>
+      </p:sp>
+      <p:pic>
+        <p:nvPicPr>
+          <p:cNvPr id="29" name="Picture 28" descr="image.png">
+            <a:hlinkClick r:id="rId6" action="ppaction://hlinksldjump"/>
+          </p:cNvPr>
+          <p:cNvPicPr>
+            <a:picLocks noChangeAspect="1"/>
+          </p:cNvPicPr>
+          <p:nvPr/>
+        </p:nvPicPr>
+        <p:blipFill>
+          <a:blip r:embed="rId8"/>
+          <a:stretch>
+            <a:fillRect/>
+          </a:stretch>
+        </p:blipFill>
+        <p:spPr>
+          <a:xfrm>
+            <a:off x="11109960" y="4846320"/>
+            <a:ext cx="329184" cy="329184"/>
+          </a:xfrm>
+          <a:prstGeom prst="rect">
+            <a:avLst/>
+          </a:prstGeom>
+        </p:spPr>
+      </p:pic>
+      <p:sp>
+        <p:nvSpPr>
+          <p:cNvPr id="30" name="Oval 29">
+            <a:hlinkClick r:id="rId7" action="ppaction://hlinksldjump"/>
+          </p:cNvPr>
+          <p:cNvSpPr/>
+          <p:nvPr/>
+        </p:nvSpPr>
+        <p:spPr>
+          <a:xfrm>
+            <a:off x="11045952" y="5733288"/>
+            <a:ext cx="457200" cy="457200"/>
+          </a:xfrm>
+          <a:prstGeom prst="ellipse">
+            <a:avLst/>
+          </a:prstGeom>
+          <a:solidFill>
+            <a:srgbClr val="E97132"/>
+          </a:solidFill>
+          <a:ln>
+            <a:noFill/>
+          </a:ln>
+          <a:effectLst/>
+        </p:spPr>
+        <p:style>
+          <a:lnRef idx="1">
+            <a:schemeClr val="accent1"/>
+          </a:lnRef>
+          <a:fillRef idx="3">
+            <a:schemeClr val="accent1"/>
+          </a:fillRef>
+          <a:effectRef idx="2">
+            <a:schemeClr val="accent1"/>
+          </a:effectRef>
+          <a:fontRef idx="minor">
+            <a:schemeClr val="lt1"/>
+          </a:fontRef>
+        </p:style>
+        <p:txBody>
+          <a:bodyPr rtlCol="0" anchor="ctr"/>
+          <a:lstStyle/>
+          <a:p>
+            <a:pPr algn="ctr"/>
+            <a:endParaRPr/>
+          </a:p>
+        </p:txBody>
+      </p:sp>
+      <p:pic>
+        <p:nvPicPr>
+          <p:cNvPr id="31" name="Picture 30" descr="image.png">
+            <a:hlinkClick r:id="rId7" action="ppaction://hlinksldjump"/>
+          </p:cNvPr>
+          <p:cNvPicPr>
+            <a:picLocks noChangeAspect="1"/>
+          </p:cNvPicPr>
+          <p:nvPr/>
+        </p:nvPicPr>
+        <p:blipFill>
+          <a:blip r:embed="rId8"/>
+          <a:stretch>
+            <a:fillRect/>
+          </a:stretch>
+        </p:blipFill>
+        <p:spPr>
+          <a:xfrm>
+            <a:off x="11109960" y="5797296"/>
+            <a:ext cx="329184" cy="329184"/>
+          </a:xfrm>
+          <a:prstGeom prst="rect">
+            <a:avLst/>
+          </a:prstGeom>
+        </p:spPr>
+      </p:pic>
     </p:spTree>
   </p:cSld>
   <p:clrMapOvr>
@@ -23802,6 +24537,45 @@
           </a:p>
         </p:txBody>
       </p:sp>
+      <p:sp>
+        <p:nvSpPr>
+          <p:cNvPr id="16" name="Text 10"/>
+          <p:cNvSpPr/>
+          <p:nvPr/>
+        </p:nvSpPr>
+        <p:spPr>
+          <a:xfrm>
+            <a:off x="640080" y="6172200"/>
+            <a:ext cx="9875520" cy="457200"/>
+          </a:xfrm>
+          <a:prstGeom prst="rect">
+            <a:avLst/>
+          </a:prstGeom>
+          <a:noFill/>
+          <a:ln/>
+        </p:spPr>
+        <p:txBody>
+          <a:bodyPr wrap="square" rtlCol="0" anchor="ctr"/>
+          <a:lstStyle/>
+          <a:p>
+            <a:pPr marL="0" indent="0">
+              <a:buNone/>
+            </a:pPr>
+            <a:r>
+              <a:rPr lang="en-US" sz="1300" i="1" dirty="0">
+                <a:solidFill>
+                  <a:srgbClr val="8AA2B8"/>
+                </a:solidFill>
+                <a:latin typeface="Calibri" pitchFamily="34" charset="0"/>
+                <a:ea typeface="Calibri" pitchFamily="34" charset="-122"/>
+                <a:cs typeface="Calibri" pitchFamily="34" charset="-120"/>
+              </a:rPr>
+              <a:t>Questions before next class? Bring them — there are no bad questions in GIS 1.</a:t>
+            </a:r>
+            <a:endParaRPr lang="en-US" sz="1300" dirty="0"/>
+          </a:p>
+        </p:txBody>
+      </p:sp>
     </p:spTree>
   </p:cSld>
   <p:clrMapOvr>
